--- a/media/resources/files/Onduktar_OrundardyMaanisiDiagrammasiOyunu_tVf5Mvw.pptx
+++ b/media/resources/files/Onduktar_OrundardyMaanisiDiagrammasiOyunu_tVf5Mvw.pptx
@@ -8698,7 +8698,7 @@
                 <a:ea typeface="+mn-ea"/>
                 <a:cs typeface="+mn-cs"/>
               </a:rPr>
-              <a:t>Турдуу пикирлер учун ыраазычылык билдиребиз.</a:t>
+              <a:t>Түрдүү пикирлер үчүн ыраазычылык билдиребиз.</a:t>
             </a:r>
           </a:p>
           <a:p>
